--- a/Vibe_Coding_Module_Slides.pptx
+++ b/Vibe_Coding_Module_Slides.pptx
@@ -7260,7 +7260,7 @@
                 <a:ea typeface="Arial" pitchFamily="34" charset="-122"/>
                 <a:cs typeface="Arial" pitchFamily="34" charset="-120"/>
               </a:rPr>
-              <a:t>EDITION 2  ·  EXPLANATION-FIRST</a:t>
+              <a:t>MODULE SLIDES  ·  EXPLANATION-FIRST</a:t>
             </a:r>
             <a:endParaRPr lang="en-US" sz="1300" dirty="0"/>
           </a:p>
@@ -7330,6 +7330,45 @@
         </p:nvSpPr>
         <p:spPr>
           <a:xfrm>
+            <a:off x="502920" y="3200400"/>
+            <a:ext cx="8229600" cy="274320"/>
+          </a:xfrm>
+          <a:prstGeom prst="rect">
+            <a:avLst/>
+          </a:prstGeom>
+          <a:noFill/>
+          <a:ln/>
+        </p:spPr>
+        <p:txBody>
+          <a:bodyPr wrap="square" lIns="0" tIns="0" rIns="0" bIns="0" rtlCol="0" anchor="ctr"/>
+          <a:lstStyle/>
+          <a:p>
+            <a:pPr indent="0" marL="0">
+              <a:buNone/>
+            </a:pPr>
+            <a:r>
+              <a:rPr lang="en-US" sz="1100" dirty="0">
+                <a:solidFill>
+                  <a:srgbClr val="5A6B63"/>
+                </a:solidFill>
+                <a:latin typeface="Arial" pitchFamily="34" charset="0"/>
+                <a:ea typeface="Arial" pitchFamily="34" charset="-122"/>
+                <a:cs typeface="Arial" pitchFamily="34" charset="-120"/>
+              </a:rPr>
+              <a:t>Version 2.0 · 2026</a:t>
+            </a:r>
+            <a:endParaRPr lang="en-US" sz="1100" dirty="0"/>
+          </a:p>
+        </p:txBody>
+      </p:sp>
+      <p:sp>
+        <p:nvSpPr>
+          <p:cNvPr id="7" name="Text 5"/>
+          <p:cNvSpPr/>
+          <p:nvPr/>
+        </p:nvSpPr>
+        <p:spPr>
+          <a:xfrm>
             <a:off x="502920" y="4681728"/>
             <a:ext cx="8229600" cy="320040"/>
           </a:xfrm>
@@ -7363,7 +7402,7 @@
       </p:sp>
       <p:sp>
         <p:nvSpPr>
-          <p:cNvPr id="7" name="Text 5"/>
+          <p:cNvPr id="8" name="Text 6"/>
           <p:cNvSpPr/>
           <p:nvPr/>
         </p:nvSpPr>
@@ -36892,7 +36931,7 @@
                 <a:ea typeface="Arial" pitchFamily="34" charset="-122"/>
                 <a:cs typeface="Arial" pitchFamily="34" charset="-120"/>
               </a:rPr>
-              <a:t>Master Teaching Guide</a:t>
+              <a:t>Instructor Book</a:t>
             </a:r>
             <a:endParaRPr lang="en-US" sz="1500" dirty="0"/>
           </a:p>
@@ -36931,7 +36970,7 @@
                 <a:ea typeface="Arial" pitchFamily="34" charset="-122"/>
                 <a:cs typeface="Arial" pitchFamily="34" charset="-120"/>
               </a:rPr>
-              <a:t>Full explanations Parts 1–28</a:t>
+              <a:t>Full teaching flow, technical encyclopedia + hands-on labs, facilitation playbook</a:t>
             </a:r>
             <a:endParaRPr lang="en-US" sz="1400" dirty="0"/>
           </a:p>
@@ -36992,7 +37031,7 @@
                 <a:ea typeface="Arial" pitchFamily="34" charset="-122"/>
                 <a:cs typeface="Arial" pitchFamily="34" charset="-120"/>
               </a:rPr>
-              <a:t>Student Study Book</a:t>
+              <a:t>Student Book</a:t>
             </a:r>
             <a:endParaRPr lang="en-US" sz="1500" dirty="0"/>
           </a:p>
@@ -37031,7 +37070,7 @@
                 <a:ea typeface="Arial" pitchFamily="34" charset="-122"/>
                 <a:cs typeface="Arial" pitchFamily="34" charset="-120"/>
               </a:rPr>
-              <a:t>Chapters + practice answers</a:t>
+              <a:t>Chapters, labs, prompts, homework, and trackers in one place</a:t>
             </a:r>
             <a:endParaRPr lang="en-US" sz="1400" dirty="0"/>
           </a:p>
@@ -37092,7 +37131,7 @@
                 <a:ea typeface="Arial" pitchFamily="34" charset="-122"/>
                 <a:cs typeface="Arial" pitchFamily="34" charset="-120"/>
               </a:rPr>
-              <a:t>Volume 2 Workshops</a:t>
+              <a:t>Module Slides</a:t>
             </a:r>
             <a:endParaRPr lang="en-US" sz="1500" dirty="0"/>
           </a:p>
@@ -37131,7 +37170,7 @@
                 <a:ea typeface="Arial" pitchFamily="34" charset="-122"/>
                 <a:cs typeface="Arial" pitchFamily="34" charset="-120"/>
               </a:rPr>
-              <a:t>13 deep hands-on labs</a:t>
+              <a:t>This deck — Vibe Coding with Claude Code classroom projection</a:t>
             </a:r>
             <a:endParaRPr lang="en-US" sz="1400" dirty="0"/>
           </a:p>
@@ -37139,107 +37178,7 @@
       </p:sp>
       <p:sp>
         <p:nvSpPr>
-          <p:cNvPr id="14" name="Shape 12"/>
-          <p:cNvSpPr/>
-          <p:nvPr/>
-        </p:nvSpPr>
-        <p:spPr>
-          <a:xfrm>
-            <a:off x="640080" y="3429000"/>
-            <a:ext cx="7863840" cy="685800"/>
-          </a:xfrm>
-          <a:prstGeom prst="roundRect">
-            <a:avLst>
-              <a:gd name="adj" fmla="val 10667"/>
-            </a:avLst>
-          </a:prstGeom>
-          <a:solidFill>
-            <a:srgbClr val="FFFFFF"/>
-          </a:solidFill>
-          <a:ln/>
-        </p:spPr>
-      </p:sp>
-      <p:sp>
-        <p:nvSpPr>
-          <p:cNvPr id="15" name="Text 13"/>
-          <p:cNvSpPr/>
-          <p:nvPr/>
-        </p:nvSpPr>
-        <p:spPr>
-          <a:xfrm>
-            <a:off x="914400" y="3593592"/>
-            <a:ext cx="4114800" cy="365760"/>
-          </a:xfrm>
-          <a:prstGeom prst="rect">
-            <a:avLst/>
-          </a:prstGeom>
-          <a:noFill/>
-          <a:ln/>
-        </p:spPr>
-        <p:txBody>
-          <a:bodyPr wrap="square" lIns="0" tIns="0" rIns="0" bIns="0" rtlCol="0" anchor="ctr"/>
-          <a:lstStyle/>
-          <a:p>
-            <a:pPr indent="0" marL="0">
-              <a:buNone/>
-            </a:pPr>
-            <a:r>
-              <a:rPr lang="en-US" sz="1500" b="1" dirty="0">
-                <a:solidFill>
-                  <a:srgbClr val="146B4F"/>
-                </a:solidFill>
-                <a:latin typeface="Arial" pitchFamily="34" charset="0"/>
-                <a:ea typeface="Arial" pitchFamily="34" charset="-122"/>
-                <a:cs typeface="Arial" pitchFamily="34" charset="-120"/>
-              </a:rPr>
-              <a:t>These slides (Ed. 2)</a:t>
-            </a:r>
-            <a:endParaRPr lang="en-US" sz="1500" dirty="0"/>
-          </a:p>
-        </p:txBody>
-      </p:sp>
-      <p:sp>
-        <p:nvSpPr>
-          <p:cNvPr id="16" name="Text 14"/>
-          <p:cNvSpPr/>
-          <p:nvPr/>
-        </p:nvSpPr>
-        <p:spPr>
-          <a:xfrm>
-            <a:off x="5029200" y="3593592"/>
-            <a:ext cx="3200400" cy="365760"/>
-          </a:xfrm>
-          <a:prstGeom prst="rect">
-            <a:avLst/>
-          </a:prstGeom>
-          <a:noFill/>
-          <a:ln/>
-        </p:spPr>
-        <p:txBody>
-          <a:bodyPr wrap="square" lIns="0" tIns="0" rIns="0" bIns="0" rtlCol="0" anchor="ctr"/>
-          <a:lstStyle/>
-          <a:p>
-            <a:pPr indent="0" marL="0">
-              <a:buNone/>
-            </a:pPr>
-            <a:r>
-              <a:rPr lang="en-US" sz="1400" dirty="0">
-                <a:solidFill>
-                  <a:srgbClr val="1A2421"/>
-                </a:solidFill>
-                <a:latin typeface="Arial" pitchFamily="34" charset="0"/>
-                <a:ea typeface="Arial" pitchFamily="34" charset="-122"/>
-                <a:cs typeface="Arial" pitchFamily="34" charset="-120"/>
-              </a:rPr>
-              <a:t>Classroom projection deck</a:t>
-            </a:r>
-            <a:endParaRPr lang="en-US" sz="1400" dirty="0"/>
-          </a:p>
-        </p:txBody>
-      </p:sp>
-      <p:sp>
-        <p:nvSpPr>
-          <p:cNvPr id="17" name="Text 15"/>
+          <p:cNvPr id="14" name="Text 12"/>
           <p:cNvSpPr/>
           <p:nvPr/>
         </p:nvSpPr>
@@ -37452,7 +37391,7 @@
                 <a:ea typeface="Arial" pitchFamily="34" charset="-122"/>
                 <a:cs typeface="Arial" pitchFamily="34" charset="-120"/>
               </a:rPr>
-              <a:t>Edition 2 slides — matched to the deep teaching guides.</a:t>
+              <a:t>Matched to the Instructor Book and Student Book.</a:t>
             </a:r>
             <a:endParaRPr lang="en-US" sz="1400" dirty="0"/>
           </a:p>

--- a/Vibe_Coding_Module_Slides.pptx
+++ b/Vibe_Coding_Module_Slides.pptx
@@ -7433,7 +7433,7 @@
                 <a:ea typeface="Arial" pitchFamily="34" charset="-122"/>
                 <a:cs typeface="Arial" pitchFamily="34" charset="-120"/>
               </a:rPr>
-              <a:t>CA Shailesh S Wadhawaniya  ·  A StrideX Institute Program, in partnership with Wadhawaniya &amp; Co.</a:t>
+              <a:t>CA Shailesh S Wadhawaniya  ·  A SHAILESH-AI Program — AI Training &amp; Consulting</a:t>
             </a:r>
             <a:endParaRPr lang="en-US" sz="1100" dirty="0"/>
           </a:p>

--- a/Vibe_Coding_Module_Slides.pptx
+++ b/Vibe_Coding_Module_Slides.pptx
@@ -7433,7 +7433,7 @@
                 <a:ea typeface="Arial" pitchFamily="34" charset="-122"/>
                 <a:cs typeface="Arial" pitchFamily="34" charset="-120"/>
               </a:rPr>
-              <a:t>CA Shailesh S Wadhawaniya  ·  A SHAILESH-AI Program — AI Training &amp; Consulting</a:t>
+              <a:t>Chartered Accountant Shailesh S Wadhawaniya  ·  A SHAILESH-AI Program — AI Training &amp; Consulting</a:t>
             </a:r>
             <a:endParaRPr lang="en-US" sz="1100" dirty="0"/>
           </a:p>
@@ -7888,7 +7888,7 @@
                 <a:ea typeface="Arial" pitchFamily="34" charset="-122"/>
                 <a:cs typeface="Arial" pitchFamily="34" charset="-120"/>
               </a:rPr>
-              <a:t>Vibe Coding with Claude Code · CA Shailesh S Wadhawaniya</a:t>
+              <a:t>Vibe Coding with Claude Code · Chartered Accountant Shailesh S Wadhawaniya</a:t>
             </a:r>
             <a:endParaRPr lang="en-US" sz="1000" dirty="0"/>
           </a:p>
@@ -8655,7 +8655,7 @@
                 <a:ea typeface="Arial" pitchFamily="34" charset="-122"/>
                 <a:cs typeface="Arial" pitchFamily="34" charset="-120"/>
               </a:rPr>
-              <a:t>Vibe Coding with Claude Code · CA Shailesh S Wadhawaniya</a:t>
+              <a:t>Vibe Coding with Claude Code · Chartered Accountant Shailesh S Wadhawaniya</a:t>
             </a:r>
             <a:endParaRPr lang="en-US" sz="1000" dirty="0"/>
           </a:p>
@@ -8932,7 +8932,7 @@
                 <a:ea typeface="Arial" pitchFamily="34" charset="-122"/>
                 <a:cs typeface="Arial" pitchFamily="34" charset="-120"/>
               </a:rPr>
-              <a:t>Vibe Coding with Claude Code · CA Shailesh S Wadhawaniya</a:t>
+              <a:t>Vibe Coding with Claude Code · Chartered Accountant Shailesh S Wadhawaniya</a:t>
             </a:r>
             <a:endParaRPr lang="en-US" sz="1000" dirty="0"/>
           </a:p>
@@ -9331,7 +9331,7 @@
                 <a:ea typeface="Arial" pitchFamily="34" charset="-122"/>
                 <a:cs typeface="Arial" pitchFamily="34" charset="-120"/>
               </a:rPr>
-              <a:t>Vibe Coding with Claude Code · CA Shailesh S Wadhawaniya</a:t>
+              <a:t>Vibe Coding with Claude Code · Chartered Accountant Shailesh S Wadhawaniya</a:t>
             </a:r>
             <a:endParaRPr lang="en-US" sz="1000" dirty="0"/>
           </a:p>
@@ -10212,7 +10212,7 @@
                 <a:ea typeface="Arial" pitchFamily="34" charset="-122"/>
                 <a:cs typeface="Arial" pitchFamily="34" charset="-120"/>
               </a:rPr>
-              <a:t>Vibe Coding with Claude Code · CA Shailesh S Wadhawaniya</a:t>
+              <a:t>Vibe Coding with Claude Code · Chartered Accountant Shailesh S Wadhawaniya</a:t>
             </a:r>
             <a:endParaRPr lang="en-US" sz="1000" dirty="0"/>
           </a:p>
@@ -10545,7 +10545,7 @@
                 <a:ea typeface="Arial" pitchFamily="34" charset="-122"/>
                 <a:cs typeface="Arial" pitchFamily="34" charset="-120"/>
               </a:rPr>
-              <a:t>Vibe Coding with Claude Code · CA Shailesh S Wadhawaniya</a:t>
+              <a:t>Vibe Coding with Claude Code · Chartered Accountant Shailesh S Wadhawaniya</a:t>
             </a:r>
             <a:endParaRPr lang="en-US" sz="1000" dirty="0"/>
           </a:p>
@@ -10800,7 +10800,7 @@
                 <a:ea typeface="Arial" pitchFamily="34" charset="-122"/>
                 <a:cs typeface="Arial" pitchFamily="34" charset="-120"/>
               </a:rPr>
-              <a:t>Vibe Coding with Claude Code · CA Shailesh S Wadhawaniya</a:t>
+              <a:t>Vibe Coding with Claude Code · Chartered Accountant Shailesh S Wadhawaniya</a:t>
             </a:r>
             <a:endParaRPr lang="en-US" sz="1000" dirty="0"/>
           </a:p>
@@ -11651,7 +11651,7 @@
                 <a:ea typeface="Arial" pitchFamily="34" charset="-122"/>
                 <a:cs typeface="Arial" pitchFamily="34" charset="-120"/>
               </a:rPr>
-              <a:t>Vibe Coding with Claude Code · CA Shailesh S Wadhawaniya</a:t>
+              <a:t>Vibe Coding with Claude Code · Chartered Accountant Shailesh S Wadhawaniya</a:t>
             </a:r>
             <a:endParaRPr lang="en-US" sz="1000" dirty="0"/>
           </a:p>
@@ -12394,7 +12394,7 @@
                 <a:ea typeface="Arial" pitchFamily="34" charset="-122"/>
                 <a:cs typeface="Arial" pitchFamily="34" charset="-120"/>
               </a:rPr>
-              <a:t>Vibe Coding with Claude Code · CA Shailesh S Wadhawaniya</a:t>
+              <a:t>Vibe Coding with Claude Code · Chartered Accountant Shailesh S Wadhawaniya</a:t>
             </a:r>
             <a:endParaRPr lang="en-US" sz="1000" dirty="0"/>
           </a:p>
@@ -13137,7 +13137,7 @@
                 <a:ea typeface="Arial" pitchFamily="34" charset="-122"/>
                 <a:cs typeface="Arial" pitchFamily="34" charset="-120"/>
               </a:rPr>
-              <a:t>Vibe Coding with Claude Code · CA Shailesh S Wadhawaniya</a:t>
+              <a:t>Vibe Coding with Claude Code · Chartered Accountant Shailesh S Wadhawaniya</a:t>
             </a:r>
             <a:endParaRPr lang="en-US" sz="1000" dirty="0"/>
           </a:p>
@@ -14062,7 +14062,7 @@
                 <a:ea typeface="Arial" pitchFamily="34" charset="-122"/>
                 <a:cs typeface="Arial" pitchFamily="34" charset="-120"/>
               </a:rPr>
-              <a:t>Vibe Coding with Claude Code · CA Shailesh S Wadhawaniya</a:t>
+              <a:t>Vibe Coding with Claude Code · Chartered Accountant Shailesh S Wadhawaniya</a:t>
             </a:r>
             <a:endParaRPr lang="en-US" sz="1000" dirty="0"/>
           </a:p>
@@ -14805,7 +14805,7 @@
                 <a:ea typeface="Arial" pitchFamily="34" charset="-122"/>
                 <a:cs typeface="Arial" pitchFamily="34" charset="-120"/>
               </a:rPr>
-              <a:t>Vibe Coding with Claude Code · CA Shailesh S Wadhawaniya</a:t>
+              <a:t>Vibe Coding with Claude Code · Chartered Accountant Shailesh S Wadhawaniya</a:t>
             </a:r>
             <a:endParaRPr lang="en-US" sz="1000" dirty="0"/>
           </a:p>
@@ -15548,7 +15548,7 @@
                 <a:ea typeface="Arial" pitchFamily="34" charset="-122"/>
                 <a:cs typeface="Arial" pitchFamily="34" charset="-120"/>
               </a:rPr>
-              <a:t>Vibe Coding with Claude Code · CA Shailesh S Wadhawaniya</a:t>
+              <a:t>Vibe Coding with Claude Code · Chartered Accountant Shailesh S Wadhawaniya</a:t>
             </a:r>
             <a:endParaRPr lang="en-US" sz="1000" dirty="0"/>
           </a:p>
@@ -15859,7 +15859,7 @@
                 <a:ea typeface="Arial" pitchFamily="34" charset="-122"/>
                 <a:cs typeface="Arial" pitchFamily="34" charset="-120"/>
               </a:rPr>
-              <a:t>Vibe Coding with Claude Code · CA Shailesh S Wadhawaniya</a:t>
+              <a:t>Vibe Coding with Claude Code · Chartered Accountant Shailesh S Wadhawaniya</a:t>
             </a:r>
             <a:endParaRPr lang="en-US" sz="1000" dirty="0"/>
           </a:p>
@@ -16304,7 +16304,7 @@
                 <a:ea typeface="Arial" pitchFamily="34" charset="-122"/>
                 <a:cs typeface="Arial" pitchFamily="34" charset="-120"/>
               </a:rPr>
-              <a:t>Vibe Coding with Claude Code · CA Shailesh S Wadhawaniya</a:t>
+              <a:t>Vibe Coding with Claude Code · Chartered Accountant Shailesh S Wadhawaniya</a:t>
             </a:r>
             <a:endParaRPr lang="en-US" sz="1000" dirty="0"/>
           </a:p>
@@ -16730,7 +16730,7 @@
                 <a:ea typeface="Arial" pitchFamily="34" charset="-122"/>
                 <a:cs typeface="Arial" pitchFamily="34" charset="-120"/>
               </a:rPr>
-              <a:t>Vibe Coding with Claude Code · CA Shailesh S Wadhawaniya</a:t>
+              <a:t>Vibe Coding with Claude Code · Chartered Accountant Shailesh S Wadhawaniya</a:t>
             </a:r>
             <a:endParaRPr lang="en-US" sz="1000" dirty="0"/>
           </a:p>
@@ -17363,7 +17363,7 @@
                 <a:ea typeface="Arial" pitchFamily="34" charset="-122"/>
                 <a:cs typeface="Arial" pitchFamily="34" charset="-120"/>
               </a:rPr>
-              <a:t>Vibe Coding with Claude Code · CA Shailesh S Wadhawaniya</a:t>
+              <a:t>Vibe Coding with Claude Code · Chartered Accountant Shailesh S Wadhawaniya</a:t>
             </a:r>
             <a:endParaRPr lang="en-US" sz="1000" dirty="0"/>
           </a:p>
@@ -18642,7 +18642,7 @@
                 <a:ea typeface="Arial" pitchFamily="34" charset="-122"/>
                 <a:cs typeface="Arial" pitchFamily="34" charset="-120"/>
               </a:rPr>
-              <a:t>Vibe Coding with Claude Code · CA Shailesh S Wadhawaniya</a:t>
+              <a:t>Vibe Coding with Claude Code · Chartered Accountant Shailesh S Wadhawaniya</a:t>
             </a:r>
             <a:endParaRPr lang="en-US" sz="1000" dirty="0"/>
           </a:p>
@@ -18948,7 +18948,7 @@
                 <a:ea typeface="Arial" pitchFamily="34" charset="-122"/>
                 <a:cs typeface="Arial" pitchFamily="34" charset="-120"/>
               </a:rPr>
-              <a:t>Vibe Coding with Claude Code · CA Shailesh S Wadhawaniya</a:t>
+              <a:t>Vibe Coding with Claude Code · Chartered Accountant Shailesh S Wadhawaniya</a:t>
             </a:r>
             <a:endParaRPr lang="en-US" sz="1000" dirty="0"/>
           </a:p>
@@ -19968,7 +19968,7 @@
                 <a:ea typeface="Arial" pitchFamily="34" charset="-122"/>
                 <a:cs typeface="Arial" pitchFamily="34" charset="-120"/>
               </a:rPr>
-              <a:t>Vibe Coding with Claude Code · CA Shailesh S Wadhawaniya</a:t>
+              <a:t>Vibe Coding with Claude Code · Chartered Accountant Shailesh S Wadhawaniya</a:t>
             </a:r>
             <a:endParaRPr lang="en-US" sz="1000" dirty="0"/>
           </a:p>
@@ -20241,7 +20241,7 @@
                 <a:ea typeface="Arial" pitchFamily="34" charset="-122"/>
                 <a:cs typeface="Arial" pitchFamily="34" charset="-120"/>
               </a:rPr>
-              <a:t>Vibe Coding with Claude Code · CA Shailesh S Wadhawaniya</a:t>
+              <a:t>Vibe Coding with Claude Code · Chartered Accountant Shailesh S Wadhawaniya</a:t>
             </a:r>
             <a:endParaRPr lang="en-US" sz="1000" dirty="0"/>
           </a:p>
@@ -20706,7 +20706,7 @@
                 <a:ea typeface="Arial" pitchFamily="34" charset="-122"/>
                 <a:cs typeface="Arial" pitchFamily="34" charset="-120"/>
               </a:rPr>
-              <a:t>Vibe Coding with Claude Code · CA Shailesh S Wadhawaniya</a:t>
+              <a:t>Vibe Coding with Claude Code · Chartered Accountant Shailesh S Wadhawaniya</a:t>
             </a:r>
             <a:endParaRPr lang="en-US" sz="1000" dirty="0"/>
           </a:p>
@@ -20978,7 +20978,7 @@
                 <a:ea typeface="Arial" pitchFamily="34" charset="-122"/>
                 <a:cs typeface="Arial" pitchFamily="34" charset="-120"/>
               </a:rPr>
-              <a:t>Vibe Coding with Claude Code · CA Shailesh S Wadhawaniya</a:t>
+              <a:t>Vibe Coding with Claude Code · Chartered Accountant Shailesh S Wadhawaniya</a:t>
             </a:r>
             <a:endParaRPr lang="en-US" sz="1000" dirty="0"/>
           </a:p>
@@ -22360,7 +22360,7 @@
                 <a:ea typeface="Arial" pitchFamily="34" charset="-122"/>
                 <a:cs typeface="Arial" pitchFamily="34" charset="-120"/>
               </a:rPr>
-              <a:t>Vibe Coding with Claude Code · CA Shailesh S Wadhawaniya</a:t>
+              <a:t>Vibe Coding with Claude Code · Chartered Accountant Shailesh S Wadhawaniya</a:t>
             </a:r>
             <a:endParaRPr lang="en-US" sz="1000" dirty="0"/>
           </a:p>
@@ -22836,7 +22836,7 @@
                 <a:ea typeface="Arial" pitchFamily="34" charset="-122"/>
                 <a:cs typeface="Arial" pitchFamily="34" charset="-120"/>
               </a:rPr>
-              <a:t>Vibe Coding with Claude Code · CA Shailesh S Wadhawaniya</a:t>
+              <a:t>Vibe Coding with Claude Code · Chartered Accountant Shailesh S Wadhawaniya</a:t>
             </a:r>
             <a:endParaRPr lang="en-US" sz="1000" dirty="0"/>
           </a:p>
@@ -23113,7 +23113,7 @@
                 <a:ea typeface="Arial" pitchFamily="34" charset="-122"/>
                 <a:cs typeface="Arial" pitchFamily="34" charset="-120"/>
               </a:rPr>
-              <a:t>Vibe Coding with Claude Code · CA Shailesh S Wadhawaniya</a:t>
+              <a:t>Vibe Coding with Claude Code · Chartered Accountant Shailesh S Wadhawaniya</a:t>
             </a:r>
             <a:endParaRPr lang="en-US" sz="1000" dirty="0"/>
           </a:p>
@@ -23656,7 +23656,7 @@
                 <a:ea typeface="Arial" pitchFamily="34" charset="-122"/>
                 <a:cs typeface="Arial" pitchFamily="34" charset="-120"/>
               </a:rPr>
-              <a:t>Vibe Coding with Claude Code · CA Shailesh S Wadhawaniya</a:t>
+              <a:t>Vibe Coding with Claude Code · Chartered Accountant Shailesh S Wadhawaniya</a:t>
             </a:r>
             <a:endParaRPr lang="en-US" sz="1000" dirty="0"/>
           </a:p>
@@ -23893,7 +23893,7 @@
                 <a:ea typeface="Arial" pitchFamily="34" charset="-122"/>
                 <a:cs typeface="Arial" pitchFamily="34" charset="-120"/>
               </a:rPr>
-              <a:t>Vibe Coding with Claude Code · CA Shailesh S Wadhawaniya</a:t>
+              <a:t>Vibe Coding with Claude Code · Chartered Accountant Shailesh S Wadhawaniya</a:t>
             </a:r>
             <a:endParaRPr lang="en-US" sz="1000" dirty="0"/>
           </a:p>
@@ -24569,7 +24569,7 @@
                 <a:ea typeface="Arial" pitchFamily="34" charset="-122"/>
                 <a:cs typeface="Arial" pitchFamily="34" charset="-120"/>
               </a:rPr>
-              <a:t>Vibe Coding with Claude Code · CA Shailesh S Wadhawaniya</a:t>
+              <a:t>Vibe Coding with Claude Code · Chartered Accountant Shailesh S Wadhawaniya</a:t>
             </a:r>
             <a:endParaRPr lang="en-US" sz="1000" dirty="0"/>
           </a:p>
@@ -24880,7 +24880,7 @@
                 <a:ea typeface="Arial" pitchFamily="34" charset="-122"/>
                 <a:cs typeface="Arial" pitchFamily="34" charset="-120"/>
               </a:rPr>
-              <a:t>Vibe Coding with Claude Code · CA Shailesh S Wadhawaniya</a:t>
+              <a:t>Vibe Coding with Claude Code · Chartered Accountant Shailesh S Wadhawaniya</a:t>
             </a:r>
             <a:endParaRPr lang="en-US" sz="1000" dirty="0"/>
           </a:p>
@@ -25135,7 +25135,7 @@
                 <a:ea typeface="Arial" pitchFamily="34" charset="-122"/>
                 <a:cs typeface="Arial" pitchFamily="34" charset="-120"/>
               </a:rPr>
-              <a:t>Vibe Coding with Claude Code · CA Shailesh S Wadhawaniya</a:t>
+              <a:t>Vibe Coding with Claude Code · Chartered Accountant Shailesh S Wadhawaniya</a:t>
             </a:r>
             <a:endParaRPr lang="en-US" sz="1000" dirty="0"/>
           </a:p>
@@ -25611,7 +25611,7 @@
                 <a:ea typeface="Arial" pitchFamily="34" charset="-122"/>
                 <a:cs typeface="Arial" pitchFamily="34" charset="-120"/>
               </a:rPr>
-              <a:t>Vibe Coding with Claude Code · CA Shailesh S Wadhawaniya</a:t>
+              <a:t>Vibe Coding with Claude Code · Chartered Accountant Shailesh S Wadhawaniya</a:t>
             </a:r>
             <a:endParaRPr lang="en-US" sz="1000" dirty="0"/>
           </a:p>
@@ -26222,7 +26222,7 @@
                 <a:ea typeface="Arial" pitchFamily="34" charset="-122"/>
                 <a:cs typeface="Arial" pitchFamily="34" charset="-120"/>
               </a:rPr>
-              <a:t>Vibe Coding with Claude Code · CA Shailesh S Wadhawaniya</a:t>
+              <a:t>Vibe Coding with Claude Code · Chartered Accountant Shailesh S Wadhawaniya</a:t>
             </a:r>
             <a:endParaRPr lang="en-US" sz="1000" dirty="0"/>
           </a:p>
@@ -26884,7 +26884,7 @@
                 <a:ea typeface="Arial" pitchFamily="34" charset="-122"/>
                 <a:cs typeface="Arial" pitchFamily="34" charset="-120"/>
               </a:rPr>
-              <a:t>Vibe Coding with Claude Code · CA Shailesh S Wadhawaniya</a:t>
+              <a:t>Vibe Coding with Claude Code · Chartered Accountant Shailesh S Wadhawaniya</a:t>
             </a:r>
             <a:endParaRPr lang="en-US" sz="1000" dirty="0"/>
           </a:p>
@@ -28266,7 +28266,7 @@
                 <a:ea typeface="Arial" pitchFamily="34" charset="-122"/>
                 <a:cs typeface="Arial" pitchFamily="34" charset="-120"/>
               </a:rPr>
-              <a:t>Vibe Coding with Claude Code · CA Shailesh S Wadhawaniya</a:t>
+              <a:t>Vibe Coding with Claude Code · Chartered Accountant Shailesh S Wadhawaniya</a:t>
             </a:r>
             <a:endParaRPr lang="en-US" sz="1000" dirty="0"/>
           </a:p>
@@ -28686,7 +28686,7 @@
                 <a:ea typeface="Arial" pitchFamily="34" charset="-122"/>
                 <a:cs typeface="Arial" pitchFamily="34" charset="-120"/>
               </a:rPr>
-              <a:t>Vibe Coding with Claude Code · CA Shailesh S Wadhawaniya</a:t>
+              <a:t>Vibe Coding with Claude Code · Chartered Accountant Shailesh S Wadhawaniya</a:t>
             </a:r>
             <a:endParaRPr lang="en-US" sz="1000" dirty="0"/>
           </a:p>
@@ -29655,7 +29655,7 @@
                 <a:ea typeface="Arial" pitchFamily="34" charset="-122"/>
                 <a:cs typeface="Arial" pitchFamily="34" charset="-120"/>
               </a:rPr>
-              <a:t>Vibe Coding with Claude Code · CA Shailesh S Wadhawaniya</a:t>
+              <a:t>Vibe Coding with Claude Code · Chartered Accountant Shailesh S Wadhawaniya</a:t>
             </a:r>
             <a:endParaRPr lang="en-US" sz="1000" dirty="0"/>
           </a:p>
@@ -29949,7 +29949,7 @@
                 <a:ea typeface="Arial" pitchFamily="34" charset="-122"/>
                 <a:cs typeface="Arial" pitchFamily="34" charset="-120"/>
               </a:rPr>
-              <a:t>Vibe Coding with Claude Code · CA Shailesh S Wadhawaniya</a:t>
+              <a:t>Vibe Coding with Claude Code · Chartered Accountant Shailesh S Wadhawaniya</a:t>
             </a:r>
             <a:endParaRPr lang="en-US" sz="1000" dirty="0"/>
           </a:p>
@@ -30208,7 +30208,7 @@
                 <a:ea typeface="Arial" pitchFamily="34" charset="-122"/>
                 <a:cs typeface="Arial" pitchFamily="34" charset="-120"/>
               </a:rPr>
-              <a:t>Vibe Coding with Claude Code · CA Shailesh S Wadhawaniya</a:t>
+              <a:t>Vibe Coding with Claude Code · Chartered Accountant Shailesh S Wadhawaniya</a:t>
             </a:r>
             <a:endParaRPr lang="en-US" sz="1000" dirty="0"/>
           </a:p>
@@ -30645,7 +30645,7 @@
                 <a:ea typeface="Arial" pitchFamily="34" charset="-122"/>
                 <a:cs typeface="Arial" pitchFamily="34" charset="-120"/>
               </a:rPr>
-              <a:t>Vibe Coding with Claude Code · CA Shailesh S Wadhawaniya</a:t>
+              <a:t>Vibe Coding with Claude Code · Chartered Accountant Shailesh S Wadhawaniya</a:t>
             </a:r>
             <a:endParaRPr lang="en-US" sz="1000" dirty="0"/>
           </a:p>
@@ -31376,7 +31376,7 @@
                 <a:ea typeface="Arial" pitchFamily="34" charset="-122"/>
                 <a:cs typeface="Arial" pitchFamily="34" charset="-120"/>
               </a:rPr>
-              <a:t>Vibe Coding with Claude Code · CA Shailesh S Wadhawaniya</a:t>
+              <a:t>Vibe Coding with Claude Code · Chartered Accountant Shailesh S Wadhawaniya</a:t>
             </a:r>
             <a:endParaRPr lang="en-US" sz="1000" dirty="0"/>
           </a:p>
@@ -31685,7 +31685,7 @@
                 <a:ea typeface="Arial" pitchFamily="34" charset="-122"/>
                 <a:cs typeface="Arial" pitchFamily="34" charset="-120"/>
               </a:rPr>
-              <a:t>Vibe Coding with Claude Code · CA Shailesh S Wadhawaniya</a:t>
+              <a:t>Vibe Coding with Claude Code · Chartered Accountant Shailesh S Wadhawaniya</a:t>
             </a:r>
             <a:endParaRPr lang="en-US" sz="1000" dirty="0"/>
           </a:p>
@@ -32296,7 +32296,7 @@
                 <a:ea typeface="Arial" pitchFamily="34" charset="-122"/>
                 <a:cs typeface="Arial" pitchFamily="34" charset="-120"/>
               </a:rPr>
-              <a:t>Vibe Coding with Claude Code · CA Shailesh S Wadhawaniya</a:t>
+              <a:t>Vibe Coding with Claude Code · Chartered Accountant Shailesh S Wadhawaniya</a:t>
             </a:r>
             <a:endParaRPr lang="en-US" sz="1000" dirty="0"/>
           </a:p>
@@ -32573,7 +32573,7 @@
                 <a:ea typeface="Arial" pitchFamily="34" charset="-122"/>
                 <a:cs typeface="Arial" pitchFamily="34" charset="-120"/>
               </a:rPr>
-              <a:t>Vibe Coding with Claude Code · CA Shailesh S Wadhawaniya</a:t>
+              <a:t>Vibe Coding with Claude Code · Chartered Accountant Shailesh S Wadhawaniya</a:t>
             </a:r>
             <a:endParaRPr lang="en-US" sz="1000" dirty="0"/>
           </a:p>
@@ -33871,7 +33871,7 @@
                 <a:ea typeface="Arial" pitchFamily="34" charset="-122"/>
                 <a:cs typeface="Arial" pitchFamily="34" charset="-120"/>
               </a:rPr>
-              <a:t>Vibe Coding with Claude Code · CA Shailesh S Wadhawaniya</a:t>
+              <a:t>Vibe Coding with Claude Code · Chartered Accountant Shailesh S Wadhawaniya</a:t>
             </a:r>
             <a:endParaRPr lang="en-US" sz="1000" dirty="0"/>
           </a:p>
@@ -34380,7 +34380,7 @@
                 <a:ea typeface="Arial" pitchFamily="34" charset="-122"/>
                 <a:cs typeface="Arial" pitchFamily="34" charset="-120"/>
               </a:rPr>
-              <a:t>Vibe Coding with Claude Code · CA Shailesh S Wadhawaniya</a:t>
+              <a:t>Vibe Coding with Claude Code · Chartered Accountant Shailesh S Wadhawaniya</a:t>
             </a:r>
             <a:endParaRPr lang="en-US" sz="1000" dirty="0"/>
           </a:p>
@@ -34800,7 +34800,7 @@
                 <a:ea typeface="Arial" pitchFamily="34" charset="-122"/>
                 <a:cs typeface="Arial" pitchFamily="34" charset="-120"/>
               </a:rPr>
-              <a:t>Vibe Coding with Claude Code · CA Shailesh S Wadhawaniya</a:t>
+              <a:t>Vibe Coding with Claude Code · Chartered Accountant Shailesh S Wadhawaniya</a:t>
             </a:r>
             <a:endParaRPr lang="en-US" sz="1000" dirty="0"/>
           </a:p>
@@ -35055,7 +35055,7 @@
                 <a:ea typeface="Arial" pitchFamily="34" charset="-122"/>
                 <a:cs typeface="Arial" pitchFamily="34" charset="-120"/>
               </a:rPr>
-              <a:t>Vibe Coding with Claude Code · CA Shailesh S Wadhawaniya</a:t>
+              <a:t>Vibe Coding with Claude Code · Chartered Accountant Shailesh S Wadhawaniya</a:t>
             </a:r>
             <a:endParaRPr lang="en-US" sz="1000" dirty="0"/>
           </a:p>
@@ -35598,7 +35598,7 @@
                 <a:ea typeface="Arial" pitchFamily="34" charset="-122"/>
                 <a:cs typeface="Arial" pitchFamily="34" charset="-120"/>
               </a:rPr>
-              <a:t>Vibe Coding with Claude Code · CA Shailesh S Wadhawaniya</a:t>
+              <a:t>Vibe Coding with Claude Code · Chartered Accountant Shailesh S Wadhawaniya</a:t>
             </a:r>
             <a:endParaRPr lang="en-US" sz="1000" dirty="0"/>
           </a:p>
@@ -36323,7 +36323,7 @@
                 <a:ea typeface="Arial" pitchFamily="34" charset="-122"/>
                 <a:cs typeface="Arial" pitchFamily="34" charset="-120"/>
               </a:rPr>
-              <a:t>Vibe Coding with Claude Code · CA Shailesh S Wadhawaniya</a:t>
+              <a:t>Vibe Coding with Claude Code · Chartered Accountant Shailesh S Wadhawaniya</a:t>
             </a:r>
             <a:endParaRPr lang="en-US" sz="1000" dirty="0"/>
           </a:p>
@@ -36766,7 +36766,7 @@
                 <a:ea typeface="Arial" pitchFamily="34" charset="-122"/>
                 <a:cs typeface="Arial" pitchFamily="34" charset="-120"/>
               </a:rPr>
-              <a:t>Vibe Coding with Claude Code · CA Shailesh S Wadhawaniya</a:t>
+              <a:t>Vibe Coding with Claude Code · Chartered Accountant Shailesh S Wadhawaniya</a:t>
             </a:r>
             <a:endParaRPr lang="en-US" sz="1000" dirty="0"/>
           </a:p>
@@ -37209,7 +37209,7 @@
                 <a:ea typeface="Arial" pitchFamily="34" charset="-122"/>
                 <a:cs typeface="Arial" pitchFamily="34" charset="-120"/>
               </a:rPr>
-              <a:t>Vibe Coding with Claude Code · CA Shailesh S Wadhawaniya</a:t>
+              <a:t>Vibe Coding with Claude Code · Chartered Accountant Shailesh S Wadhawaniya</a:t>
             </a:r>
             <a:endParaRPr lang="en-US" sz="1000" dirty="0"/>
           </a:p>
@@ -38134,7 +38134,7 @@
                 <a:ea typeface="Arial" pitchFamily="34" charset="-122"/>
                 <a:cs typeface="Arial" pitchFamily="34" charset="-120"/>
               </a:rPr>
-              <a:t>Vibe Coding with Claude Code · CA Shailesh S Wadhawaniya</a:t>
+              <a:t>Vibe Coding with Claude Code · Chartered Accountant Shailesh S Wadhawaniya</a:t>
             </a:r>
             <a:endParaRPr lang="en-US" sz="1000" dirty="0"/>
           </a:p>
@@ -38445,7 +38445,7 @@
                 <a:ea typeface="Arial" pitchFamily="34" charset="-122"/>
                 <a:cs typeface="Arial" pitchFamily="34" charset="-120"/>
               </a:rPr>
-              <a:t>Vibe Coding with Claude Code · CA Shailesh S Wadhawaniya</a:t>
+              <a:t>Vibe Coding with Claude Code · Chartered Accountant Shailesh S Wadhawaniya</a:t>
             </a:r>
             <a:endParaRPr lang="en-US" sz="1000" dirty="0"/>
           </a:p>
